--- a/index/designs/y7-l12/l6-partner-interview/l6-partner-interview.pptx
+++ b/index/designs/y7-l12/l6-partner-interview/l6-partner-interview.pptx
@@ -4005,12 +4005,6 @@
               </a:rPr>
               <a:t>Preview: Next lesson we tighten up the grammar — </a:t>
             </a:r>
-            <a:pPr algn="l" indent="0" marL="0">
-              <a:lnSpc>
-                <a:spcPts val="1330"/>
-              </a:lnSpc>
-              <a:buNone/>
-            </a:pPr>
             <a:r>
               <a:rPr lang="en-US" sz="950" b="1" dirty="0">
                 <a:solidFill>
@@ -4022,12 +4016,6 @@
               </a:rPr>
               <a:t>matching sentence halves</a:t>
             </a:r>
-            <a:pPr algn="l" indent="0" marL="0">
-              <a:lnSpc>
-                <a:spcPts val="1330"/>
-              </a:lnSpc>
-              <a:buNone/>
-            </a:pPr>
             <a:r>
               <a:rPr lang="en-US" sz="950" dirty="0">
                 <a:solidFill>
@@ -4039,12 +4027,6 @@
               </a:rPr>
               <a:t>, </a:t>
             </a:r>
-            <a:pPr algn="l" indent="0" marL="0">
-              <a:lnSpc>
-                <a:spcPts val="1330"/>
-              </a:lnSpc>
-              <a:buNone/>
-            </a:pPr>
             <a:r>
               <a:rPr lang="en-US" sz="950" b="1" dirty="0">
                 <a:solidFill>
@@ -4056,12 +4038,6 @@
               </a:rPr>
               <a:t>forming questions from answers</a:t>
             </a:r>
-            <a:pPr algn="l" indent="0" marL="0">
-              <a:lnSpc>
-                <a:spcPts val="1330"/>
-              </a:lnSpc>
-              <a:buNone/>
-            </a:pPr>
             <a:r>
               <a:rPr lang="en-US" sz="950" dirty="0">
                 <a:solidFill>
@@ -4073,12 +4049,6 @@
               </a:rPr>
               <a:t>, and </a:t>
             </a:r>
-            <a:pPr algn="l" indent="0" marL="0">
-              <a:lnSpc>
-                <a:spcPts val="1330"/>
-              </a:lnSpc>
-              <a:buNone/>
-            </a:pPr>
             <a:r>
               <a:rPr lang="en-US" sz="950" b="1" dirty="0">
                 <a:solidFill>
@@ -4090,12 +4060,6 @@
               </a:rPr>
               <a:t>spotting negation</a:t>
             </a:r>
-            <a:pPr algn="l" indent="0" marL="0">
-              <a:lnSpc>
-                <a:spcPts val="1330"/>
-              </a:lnSpc>
-              <a:buNone/>
-            </a:pPr>
             <a:r>
               <a:rPr lang="en-US" sz="950" dirty="0">
                 <a:solidFill>
@@ -4531,12 +4495,6 @@
               </a:rPr>
               <a:t>Today: </a:t>
             </a:r>
-            <a:pPr algn="ctr" indent="0" marL="0">
-              <a:spcBef>
-                <a:spcPts val="800"/>
-              </a:spcBef>
-              <a:buNone/>
-            </a:pPr>
             <a:r>
               <a:rPr lang="en-US" sz="1150" b="1" dirty="0">
                 <a:solidFill>
@@ -4548,12 +4506,6 @@
               </a:rPr>
               <a:t>采访 (cǎifǎng)</a:t>
             </a:r>
-            <a:pPr algn="ctr" indent="0" marL="0">
-              <a:spcBef>
-                <a:spcPts val="800"/>
-              </a:spcBef>
-              <a:buNone/>
-            </a:pPr>
             <a:r>
               <a:rPr lang="en-US" sz="1150" dirty="0">
                 <a:solidFill>
@@ -6777,12 +6729,6 @@
               </a:rPr>
               <a:t>The rule:</a:t>
             </a:r>
-            <a:pPr algn="l" indent="0" marL="0">
-              <a:lnSpc>
-                <a:spcPts val="1540"/>
-              </a:lnSpc>
-              <a:buNone/>
-            </a:pPr>
             <a:r>
               <a:rPr lang="en-US" sz="1100" dirty="0">
                 <a:solidFill>
@@ -6794,12 +6740,6 @@
               </a:rPr>
               <a:t> time words (七点 / 几点) and frequency words (每天) come </a:t>
             </a:r>
-            <a:pPr algn="l" indent="0" marL="0">
-              <a:lnSpc>
-                <a:spcPts val="1540"/>
-              </a:lnSpc>
-              <a:buNone/>
-            </a:pPr>
             <a:r>
               <a:rPr lang="en-US" sz="1100" b="1" dirty="0">
                 <a:solidFill>
@@ -6811,12 +6751,6 @@
               </a:rPr>
               <a:t>before</a:t>
             </a:r>
-            <a:pPr algn="l" indent="0" marL="0">
-              <a:lnSpc>
-                <a:spcPts val="1540"/>
-              </a:lnSpc>
-              <a:buNone/>
-            </a:pPr>
             <a:r>
               <a:rPr lang="en-US" sz="1100" dirty="0">
                 <a:solidFill>
@@ -7295,9 +7229,6 @@
               </a:rPr>
               <a:t>We are learning to </a:t>
             </a:r>
-            <a:pPr algn="l" indent="0" marL="0">
-              <a:buNone/>
-            </a:pPr>
             <a:r>
               <a:rPr lang="en-US" sz="1400" b="1" dirty="0">
                 <a:solidFill>
@@ -7309,9 +7240,6 @@
               </a:rPr>
               <a:t>ask and answer</a:t>
             </a:r>
-            <a:pPr algn="l" indent="0" marL="0">
-              <a:buNone/>
-            </a:pPr>
             <a:r>
               <a:rPr lang="en-US" sz="1400" dirty="0">
                 <a:solidFill>
@@ -7435,9 +7363,6 @@
               </a:rPr>
               <a:t>I can ask at least </a:t>
             </a:r>
-            <a:pPr algn="l" indent="0" marL="0">
-              <a:buNone/>
-            </a:pPr>
             <a:r>
               <a:rPr lang="en-US" sz="1250" b="1" dirty="0">
                 <a:solidFill>
@@ -7449,9 +7374,6 @@
               </a:rPr>
               <a:t>6 interview questions</a:t>
             </a:r>
-            <a:pPr algn="l" indent="0" marL="0">
-              <a:buNone/>
-            </a:pPr>
             <a:r>
               <a:rPr lang="en-US" sz="1250" dirty="0">
                 <a:solidFill>
@@ -7614,9 +7536,6 @@
               </a:rPr>
               <a:t>I can answer interview questions about </a:t>
             </a:r>
-            <a:pPr algn="l" indent="0" marL="0">
-              <a:buNone/>
-            </a:pPr>
             <a:r>
               <a:rPr lang="en-US" sz="1250" b="1" dirty="0">
                 <a:solidFill>
@@ -7628,9 +7547,6 @@
               </a:rPr>
               <a:t>my own family</a:t>
             </a:r>
-            <a:pPr algn="l" indent="0" marL="0">
-              <a:buNone/>
-            </a:pPr>
             <a:r>
               <a:rPr lang="en-US" sz="1250" dirty="0">
                 <a:solidFill>
@@ -7793,9 +7709,6 @@
               </a:rPr>
               <a:t>I can </a:t>
             </a:r>
-            <a:pPr algn="l" indent="0" marL="0">
-              <a:buNone/>
-            </a:pPr>
             <a:r>
               <a:rPr lang="en-US" sz="1250" b="1" dirty="0">
                 <a:solidFill>
@@ -7807,9 +7720,6 @@
               </a:rPr>
               <a:t>report one fact</a:t>
             </a:r>
-            <a:pPr algn="l" indent="0" marL="0">
-              <a:buNone/>
-            </a:pPr>
             <a:r>
               <a:rPr lang="en-US" sz="1250" dirty="0">
                 <a:solidFill>
@@ -8473,9 +8383,6 @@
               </a:rPr>
               <a:t>wake up · </a:t>
             </a:r>
-            <a:pPr algn="r" indent="0" marL="0">
-              <a:buNone/>
-            </a:pPr>
             <a:r>
               <a:rPr lang="en-US" sz="1100" b="1" dirty="0">
                 <a:solidFill>
@@ -8657,9 +8564,6 @@
               </a:rPr>
               <a:t>how you get to school · </a:t>
             </a:r>
-            <a:pPr algn="r" indent="0" marL="0">
-              <a:buNone/>
-            </a:pPr>
             <a:r>
               <a:rPr lang="en-US" sz="1100" b="1" dirty="0">
                 <a:solidFill>
@@ -8811,9 +8715,6 @@
               </a:rPr>
               <a:t>start class · </a:t>
             </a:r>
-            <a:pPr algn="r" indent="0" marL="0">
-              <a:buNone/>
-            </a:pPr>
             <a:r>
               <a:rPr lang="en-US" sz="1100" b="1" dirty="0">
                 <a:solidFill>
@@ -8995,9 +8896,6 @@
               </a:rPr>
               <a:t>parent's commute · </a:t>
             </a:r>
-            <a:pPr algn="r" indent="0" marL="0">
-              <a:buNone/>
-            </a:pPr>
             <a:r>
               <a:rPr lang="en-US" sz="1100" b="1" dirty="0">
                 <a:solidFill>
@@ -9149,9 +9047,6 @@
               </a:rPr>
               <a:t>parent finishes work · </a:t>
             </a:r>
-            <a:pPr algn="r" indent="0" marL="0">
-              <a:buNone/>
-            </a:pPr>
             <a:r>
               <a:rPr lang="en-US" sz="1100" b="1" dirty="0">
                 <a:solidFill>
@@ -9333,9 +9228,6 @@
               </a:rPr>
               <a:t>go to sleep · </a:t>
             </a:r>
-            <a:pPr algn="r" indent="0" marL="0">
-              <a:buNone/>
-            </a:pPr>
             <a:r>
               <a:rPr lang="en-US" sz="1100" b="1" dirty="0">
                 <a:solidFill>
@@ -9906,9 +9798,6 @@
               </a:rPr>
               <a:t>How do you ask </a:t>
             </a:r>
-            <a:pPr algn="l" indent="0" marL="0">
-              <a:buNone/>
-            </a:pPr>
             <a:r>
               <a:rPr lang="en-US" sz="1350" b="1" dirty="0">
                 <a:solidFill>
@@ -9920,9 +9809,6 @@
               </a:rPr>
               <a:t>"what time do you get up"</a:t>
             </a:r>
-            <a:pPr algn="l" indent="0" marL="0">
-              <a:buNone/>
-            </a:pPr>
             <a:r>
               <a:rPr lang="en-US" sz="1350" dirty="0">
                 <a:solidFill>
@@ -10044,9 +9930,6 @@
               </a:rPr>
               <a:t>Thumbs up/down: </a:t>
             </a:r>
-            <a:pPr algn="l" indent="0" marL="0">
-              <a:buNone/>
-            </a:pPr>
             <a:r>
               <a:rPr lang="en-US" sz="1350" b="1" dirty="0">
                 <a:solidFill>
@@ -10058,9 +9941,6 @@
               </a:rPr>
               <a:t>起床</a:t>
             </a:r>
-            <a:pPr algn="l" indent="0" marL="0">
-              <a:buNone/>
-            </a:pPr>
             <a:r>
               <a:rPr lang="en-US" sz="1350" dirty="0">
                 <a:solidFill>
@@ -10072,9 +9952,6 @@
               </a:rPr>
               <a:t> means </a:t>
             </a:r>
-            <a:pPr algn="l" indent="0" marL="0">
-              <a:buNone/>
-            </a:pPr>
             <a:r>
               <a:rPr lang="en-US" sz="1350" b="1" dirty="0">
                 <a:solidFill>
@@ -10086,9 +9963,6 @@
               </a:rPr>
               <a:t>"get up"</a:t>
             </a:r>
-            <a:pPr algn="l" indent="0" marL="0">
-              <a:buNone/>
-            </a:pPr>
             <a:r>
               <a:rPr lang="en-US" sz="1350" dirty="0">
                 <a:solidFill>
@@ -10210,9 +10084,6 @@
               </a:rPr>
               <a:t>If your partner says </a:t>
             </a:r>
-            <a:pPr algn="l" indent="0" marL="0">
-              <a:buNone/>
-            </a:pPr>
             <a:r>
               <a:rPr lang="en-US" sz="1350" b="1" dirty="0">
                 <a:solidFill>
@@ -10224,9 +10095,6 @@
               </a:rPr>
               <a:t>坐地铁</a:t>
             </a:r>
-            <a:pPr algn="l" indent="0" marL="0">
-              <a:buNone/>
-            </a:pPr>
             <a:r>
               <a:rPr lang="en-US" sz="1350" dirty="0">
                 <a:solidFill>
@@ -10903,9 +10771,6 @@
               </a:rPr>
               <a:t>起床</a:t>
             </a:r>
-            <a:pPr algn="l" indent="0" marL="0">
-              <a:buNone/>
-            </a:pPr>
             <a:r>
               <a:rPr lang="en-US" sz="1250" dirty="0">
                 <a:solidFill>
@@ -11066,9 +10931,6 @@
               </a:rPr>
               <a:t>坐地铁</a:t>
             </a:r>
-            <a:pPr algn="l" indent="0" marL="0">
-              <a:buNone/>
-            </a:pPr>
             <a:r>
               <a:rPr lang="en-US" sz="1250" dirty="0">
                 <a:solidFill>
@@ -12011,12 +11873,6 @@
               </a:rPr>
               <a:t>Full sentence frames </a:t>
             </a:r>
-            <a:pPr algn="l" indent="0" marL="0">
-              <a:lnSpc>
-                <a:spcPts val="1400"/>
-              </a:lnSpc>
-              <a:buNone/>
-            </a:pPr>
             <a:r>
               <a:rPr lang="en-US" sz="1000" b="1" dirty="0">
                 <a:solidFill>
@@ -12028,12 +11884,6 @@
               </a:rPr>
               <a:t>and</a:t>
             </a:r>
-            <a:pPr algn="l" indent="0" marL="0">
-              <a:lnSpc>
-                <a:spcPts val="1400"/>
-              </a:lnSpc>
-              <a:buNone/>
-            </a:pPr>
             <a:r>
               <a:rPr lang="en-US" sz="1000" dirty="0">
                 <a:solidFill>
@@ -13221,6 +13071,95 @@
               </a:rPr>
               <a:t>Add </a:t>
             </a:r>
+            <a:r>
+              <a:rPr lang="en-US" sz="900" b="1" dirty="0">
+                <a:solidFill>
+                  <a:srgbClr val="1E2A38"/>
+                </a:solidFill>
+                <a:latin typeface="Noto Sans SC" pitchFamily="34" charset="0"/>
+                <a:ea typeface="Noto Sans SC" pitchFamily="34" charset="-122"/>
+                <a:cs typeface="Noto Sans SC" pitchFamily="34" charset="-120"/>
+              </a:rPr>
+              <a:t>ONE</a:t>
+            </a:r>
+            <a:r>
+              <a:rPr lang="en-US" sz="900" dirty="0">
+                <a:solidFill>
+                  <a:srgbClr val="5B6677"/>
+                </a:solidFill>
+                <a:latin typeface="Noto Sans SC" pitchFamily="34" charset="0"/>
+                <a:ea typeface="Noto Sans SC" pitchFamily="34" charset="-122"/>
+                <a:cs typeface="Noto Sans SC" pitchFamily="34" charset="-120"/>
+              </a:rPr>
+              <a:t> follow-up question of their own choosing, and note the partner's answer to report back.</a:t>
+            </a:r>
+            <a:endParaRPr lang="en-US" sz="900" dirty="0"/>
+          </a:p>
+        </p:txBody>
+      </p:sp>
+      <p:sp>
+        <p:nvSpPr>
+          <p:cNvPr id="29" name="Text 27"/>
+          <p:cNvSpPr/>
+          <p:nvPr/>
+        </p:nvSpPr>
+        <p:spPr>
+          <a:xfrm>
+            <a:off x="7960816" y="3570982"/>
+            <a:ext cx="3389799" cy="133350"/>
+          </a:xfrm>
+          <a:prstGeom prst="rect">
+            <a:avLst/>
+          </a:prstGeom>
+          <a:noFill/>
+          <a:ln/>
+        </p:spPr>
+        <p:txBody>
+          <a:bodyPr wrap="square" lIns="0" tIns="0" rIns="0" bIns="0" rtlCol="0" anchor="t"/>
+          <a:lstStyle/>
+          <a:p>
+            <a:pPr algn="l" indent="0" marL="0">
+              <a:spcAft>
+                <a:spcPts val="300"/>
+              </a:spcAft>
+              <a:buNone/>
+            </a:pPr>
+            <a:r>
+              <a:rPr lang="en-US" sz="750" b="1" dirty="0">
+                <a:solidFill>
+                  <a:srgbClr val="D4756B"/>
+                </a:solidFill>
+                <a:latin typeface="Noto Sans SC" pitchFamily="34" charset="0"/>
+                <a:ea typeface="Noto Sans SC" pitchFamily="34" charset="-122"/>
+                <a:cs typeface="Noto Sans SC" pitchFamily="34" charset="-120"/>
+              </a:rPr>
+              <a:t>OTR</a:t>
+            </a:r>
+            <a:endParaRPr lang="en-US" sz="750" dirty="0"/>
+          </a:p>
+        </p:txBody>
+      </p:sp>
+      <p:sp>
+        <p:nvSpPr>
+          <p:cNvPr id="30" name="Text 28"/>
+          <p:cNvSpPr/>
+          <p:nvPr/>
+        </p:nvSpPr>
+        <p:spPr>
+          <a:xfrm>
+            <a:off x="7960816" y="3742432"/>
+            <a:ext cx="3389799" cy="308372"/>
+          </a:xfrm>
+          <a:prstGeom prst="rect">
+            <a:avLst/>
+          </a:prstGeom>
+          <a:noFill/>
+          <a:ln/>
+        </p:spPr>
+        <p:txBody>
+          <a:bodyPr wrap="square" lIns="0" tIns="0" rIns="0" bIns="0" rtlCol="0" anchor="t"/>
+          <a:lstStyle/>
+          <a:p>
             <a:pPr algn="l" indent="0" marL="0">
               <a:lnSpc>
                 <a:spcPts val="1215"/>
@@ -13228,23 +13167,6 @@
               <a:buNone/>
             </a:pPr>
             <a:r>
-              <a:rPr lang="en-US" sz="900" b="1" dirty="0">
-                <a:solidFill>
-                  <a:srgbClr val="1E2A38"/>
-                </a:solidFill>
-                <a:latin typeface="Noto Sans SC" pitchFamily="34" charset="0"/>
-                <a:ea typeface="Noto Sans SC" pitchFamily="34" charset="-122"/>
-                <a:cs typeface="Noto Sans SC" pitchFamily="34" charset="-120"/>
-              </a:rPr>
-              <a:t>ONE</a:t>
-            </a:r>
-            <a:pPr algn="l" indent="0" marL="0">
-              <a:lnSpc>
-                <a:spcPts val="1215"/>
-              </a:lnSpc>
-              <a:buNone/>
-            </a:pPr>
-            <a:r>
               <a:rPr lang="en-US" sz="900" dirty="0">
                 <a:solidFill>
                   <a:srgbClr val="5B6677"/>
@@ -13253,98 +13175,8 @@
                 <a:ea typeface="Noto Sans SC" pitchFamily="34" charset="-122"/>
                 <a:cs typeface="Noto Sans SC" pitchFamily="34" charset="-120"/>
               </a:rPr>
-              <a:t> follow-up question of their own choosing, and note the partner's answer to report back.</a:t>
-            </a:r>
-            <a:endParaRPr lang="en-US" sz="900" dirty="0"/>
-          </a:p>
-        </p:txBody>
-      </p:sp>
-      <p:sp>
-        <p:nvSpPr>
-          <p:cNvPr id="29" name="Text 27"/>
-          <p:cNvSpPr/>
-          <p:nvPr/>
-        </p:nvSpPr>
-        <p:spPr>
-          <a:xfrm>
-            <a:off x="7960816" y="3570982"/>
-            <a:ext cx="3389799" cy="133350"/>
-          </a:xfrm>
-          <a:prstGeom prst="rect">
-            <a:avLst/>
-          </a:prstGeom>
-          <a:noFill/>
-          <a:ln/>
-        </p:spPr>
-        <p:txBody>
-          <a:bodyPr wrap="square" lIns="0" tIns="0" rIns="0" bIns="0" rtlCol="0" anchor="t"/>
-          <a:lstStyle/>
-          <a:p>
-            <a:pPr algn="l" indent="0" marL="0">
-              <a:spcAft>
-                <a:spcPts val="300"/>
-              </a:spcAft>
-              <a:buNone/>
-            </a:pPr>
-            <a:r>
-              <a:rPr lang="en-US" sz="750" b="1" dirty="0">
-                <a:solidFill>
-                  <a:srgbClr val="D4756B"/>
-                </a:solidFill>
-                <a:latin typeface="Noto Sans SC" pitchFamily="34" charset="0"/>
-                <a:ea typeface="Noto Sans SC" pitchFamily="34" charset="-122"/>
-                <a:cs typeface="Noto Sans SC" pitchFamily="34" charset="-120"/>
-              </a:rPr>
-              <a:t>OTR</a:t>
-            </a:r>
-            <a:endParaRPr lang="en-US" sz="750" dirty="0"/>
-          </a:p>
-        </p:txBody>
-      </p:sp>
-      <p:sp>
-        <p:nvSpPr>
-          <p:cNvPr id="30" name="Text 28"/>
-          <p:cNvSpPr/>
-          <p:nvPr/>
-        </p:nvSpPr>
-        <p:spPr>
-          <a:xfrm>
-            <a:off x="7960816" y="3742432"/>
-            <a:ext cx="3389799" cy="308372"/>
-          </a:xfrm>
-          <a:prstGeom prst="rect">
-            <a:avLst/>
-          </a:prstGeom>
-          <a:noFill/>
-          <a:ln/>
-        </p:spPr>
-        <p:txBody>
-          <a:bodyPr wrap="square" lIns="0" tIns="0" rIns="0" bIns="0" rtlCol="0" anchor="t"/>
-          <a:lstStyle/>
-          <a:p>
-            <a:pPr algn="l" indent="0" marL="0">
-              <a:lnSpc>
-                <a:spcPts val="1215"/>
-              </a:lnSpc>
-              <a:buNone/>
-            </a:pPr>
-            <a:r>
-              <a:rPr lang="en-US" sz="900" dirty="0">
-                <a:solidFill>
-                  <a:srgbClr val="5B6677"/>
-                </a:solidFill>
-                <a:latin typeface="Noto Sans SC" pitchFamily="34" charset="0"/>
-                <a:ea typeface="Noto Sans SC" pitchFamily="34" charset="-122"/>
-                <a:cs typeface="Noto Sans SC" pitchFamily="34" charset="-120"/>
-              </a:rPr>
               <a:t>Cold call 4 students to report one fact about their partner to the class, e.g. </a:t>
             </a:r>
-            <a:pPr algn="l" indent="0" marL="0">
-              <a:lnSpc>
-                <a:spcPts val="1215"/>
-              </a:lnSpc>
-              <a:buNone/>
-            </a:pPr>
             <a:r>
               <a:rPr lang="en-US" sz="900" b="1" dirty="0">
                 <a:solidFill>
